--- a/media/resources/files/Ekvivalenettuuluk_Onduktardan_menen_Payizga-TarsiaKurak.pptx
+++ b/media/resources/files/Ekvivalenettuuluk_Onduktardan_menen_Payizga-TarsiaKurak.pptx
@@ -7314,7 +7314,7 @@
                 <a:ea typeface="+mn-ea"/>
                 <a:cs typeface="+mn-cs"/>
               </a:rPr>
-              <a:t>Турдуу пикирлер учун ыраазычылык билдиребиз.</a:t>
+              <a:t>Түрдүү пикирлер үчүн ыраазычылык билдиребиз.</a:t>
             </a:r>
           </a:p>
           <a:p>

--- a/media/resources/files/Ekvivalenettuuluk_Onduktardan_menen_Payizga-TarsiaKurak.pptx
+++ b/media/resources/files/Ekvivalenettuuluk_Onduktardan_menen_Payizga-TarsiaKurak.pptx
@@ -4051,7 +4051,7 @@
                 <a:ea typeface="+mn-ea"/>
                 <a:cs typeface="Arial" panose="020B0604020202020204" pitchFamily="34" charset="0"/>
               </a:rPr>
-              <a:t>Окуучуларга  тарсиа курактын туура болгондон кийин гана, клей менен жабыштырууну сунуштоо керек</a:t>
+              <a:t>Окуучулар куракты туура чогулткандан кийин гана клей менен чапташсын.</a:t>
             </a:r>
           </a:p>
           <a:p>
@@ -4120,7 +4120,7 @@
                 <a:ea typeface="+mn-ea"/>
                 <a:cs typeface="Arial" panose="020B0604020202020204" pitchFamily="34" charset="0"/>
               </a:rPr>
-              <a:t>үч бурчтуктарды кесип алуунун ордуна , окуучулар жөн гана тамгаларды  колдонуу менен суроолор менен жоопторду дал келтирип чыгышса болот, (кайсы жана клей жок болгон учурда)</a:t>
+              <a:t>үч бурчтуктарды кесип алуунун ордуна, окуучулар жөн гана тамгаларды  колдонуу менен суроолор менен жоопторду дал келтирип чыгышса болот, (кайчы жана клей жок болгон учурда)</a:t>
             </a:r>
           </a:p>
           <a:p>
@@ -4189,7 +4189,7 @@
                 <a:ea typeface="+mn-ea"/>
                 <a:cs typeface="Arial" panose="020B0604020202020204" pitchFamily="34" charset="0"/>
               </a:rPr>
-              <a:t>Тарсиа Курак  2 өлчөмдө даярдаоган</a:t>
+              <a:t>Тарсиа Курак  2 өлчөмдө даярдалган</a:t>
             </a:r>
             <a:r>
               <a:rPr kumimoji="0" lang="en-GB" sz="2000" b="0" i="0" u="none" strike="noStrike" kern="1200" cap="none" spc="0" normalizeH="0" baseline="0" noProof="0" dirty="0">
@@ -6387,7 +6387,7 @@
                 <a:ea typeface="Verdana" panose="020B0604030504040204" pitchFamily="34" charset="0"/>
                 <a:cs typeface="Arial" panose="020B0604020202020204" pitchFamily="34" charset="0"/>
               </a:rPr>
-              <a:t> Ар бир  үч бурчтуктун четиндеги суроо туура жоопко  дал келгидей , бири-бирине карама-каршы тургандай үч бурчтук түзүңүз</a:t>
+              <a:t> Ар бир  үч бурчтуктун четиндеги суроо туура жоопко  дал келгидей, бири-бирине карама-каршы тургандай үч бурчтук түзүңүз</a:t>
             </a:r>
             <a:endParaRPr kumimoji="0" lang="en-US" sz="2400" b="1" i="0" u="none" strike="noStrike" kern="1200" cap="none" spc="0" normalizeH="0" baseline="0" noProof="0" dirty="0">
               <a:ln>
